--- a/media/exports/reports/2025-11/people-helped.pptx
+++ b/media/exports/reports/2025-11/people-helped.pptx
@@ -196,13 +196,13 @@
                   <c:v>Emergency relief</c:v>
                 </c:pt>
                 <c:pt idx="2">
+                  <c:v>Community meals</c:v>
+                </c:pt>
+                <c:pt idx="3">
                   <c:v>Housing support</c:v>
                 </c:pt>
-                <c:pt idx="3">
+                <c:pt idx="4">
                   <c:v>Digital literacy</c:v>
-                </c:pt>
-                <c:pt idx="4">
-                  <c:v>Community meals</c:v>
                 </c:pt>
               </c:strCache>
             </c:strRef>
@@ -214,19 +214,19 @@
                 <c:formatCode>0.0"%";[Red](0.0"%")</c:formatCode>
                 <c:ptCount val="5"/>
                 <c:pt idx="0">
-                  <c:v>88.4</c:v>
+                  <c:v>87.0</c:v>
                 </c:pt>
                 <c:pt idx="1">
                   <c:v>89.6</c:v>
                 </c:pt>
                 <c:pt idx="2">
-                  <c:v>90.7</c:v>
+                  <c:v>90.4</c:v>
                 </c:pt>
                 <c:pt idx="3">
-                  <c:v>92.3</c:v>
+                  <c:v>93.3</c:v>
                 </c:pt>
                 <c:pt idx="4">
-                  <c:v>92.8</c:v>
+                  <c:v>96.0</c:v>
                 </c:pt>
               </c:numCache>
             </c:numRef>
@@ -290,7 +290,7 @@
       <c:valAx>
         <c:axId val="-2113994440"/>
         <c:scaling>
-          <c:max val="106.71999999999998"/>
+          <c:max val="110.39999999999999"/>
           <c:min val="0.0"/>
         </c:scaling>
         <c:delete/>
@@ -1039,7 +1039,7 @@
           <a:lstStyle/>
           <a:p>
             <a:r>
-              <a:t>How many people did we help this month, and how many couldn't we reach?. People helped, November: 495; Couldn't reach, November: 51; Share reached, November: 90.7%. 495 people were helped in November, and 51 came to a program but couldn't be helped: 90.7% reached (target 90.0%), against 88.2% in October. Youth outreach reached the smallest share: 88.4% (15 couldn't be helped). The main reason: program at capacity (19 people).</a:t>
+              <a:t>How many people did we help this month, and how many couldn't we reach?. People helped, November: 495; Couldn't reach, November: 52; Share reached, November: 90.5%. 495 people were helped in November, and 52 came to a program but couldn't be helped: 90.5% reached (target 90.0%), against 91.0% in October. Youth outreach reached the smallest share: 87.0% (17 couldn't be helped). The main reason: program at capacity (17 people).</a:t>
             </a:r>
           </a:p>
         </p:txBody>
@@ -4594,7 +4594,7 @@
                 </a:solidFill>
                 <a:latin typeface="Roboto"/>
               </a:rPr>
-              <a:t>Data retrieved 2pm, Tue 6 Oct 2026 · Generated 8 Oct 2026, 6:29pm · Sample data · Made with Python (python-pptx)</a:t>
+              <a:t>Data retrieved 2pm, Tue 6 Oct 2026 · Generated 8 Oct 2026, 11:41pm · Sample data · Made with Python (python-pptx)</a:t>
             </a:r>
           </a:p>
         </p:txBody>
@@ -5106,7 +5106,7 @@
                 </a:solidFill>
                 <a:latin typeface="Roboto"/>
               </a:rPr>
-              <a:t>51</a:t>
+              <a:t>52</a:t>
             </a:r>
           </a:p>
         </p:txBody>
@@ -5145,7 +5145,7 @@
                 </a:solidFill>
                 <a:latin typeface="Roboto"/>
               </a:rPr>
-              <a:t>October 68</a:t>
+              <a:t>October 50</a:t>
             </a:r>
           </a:p>
         </p:txBody>
@@ -5272,7 +5272,7 @@
                 </a:solidFill>
                 <a:latin typeface="Roboto"/>
               </a:rPr>
-              <a:t>90.7%</a:t>
+              <a:t>90.5%</a:t>
             </a:r>
           </a:p>
         </p:txBody>
@@ -5342,7 +5342,7 @@
         </p:nvCxnSpPr>
         <p:spPr>
           <a:xfrm>
-            <a:off x="9356456" y="2620868"/>
+            <a:off x="9172587" y="2620868"/>
             <a:ext cx="0" cy="2267834"/>
           </a:xfrm>
           <a:prstGeom prst="line">
@@ -5378,7 +5378,7 @@
         </p:nvSpPr>
         <p:spPr>
           <a:xfrm>
-            <a:off x="8259176" y="4888702"/>
+            <a:off x="8075307" y="4888702"/>
             <a:ext cx="2194560" cy="237744"/>
           </a:xfrm>
           <a:prstGeom prst="rect">
@@ -5531,7 +5531,7 @@
                 </a:solidFill>
                 <a:latin typeface="Roboto"/>
               </a:rPr>
-              <a:t>495 people were helped in November, and 51 came to a program but couldn't be helped: 90.7% reached (target 90.0%), against 88.2% in October.</a:t>
+              <a:t>495 people were helped in November, and 52 came to a program but couldn't be helped: 90.5% reached (target 90.0%), against 91.0% in October.</a:t>
             </a:r>
           </a:p>
         </p:txBody>
@@ -5658,7 +5658,7 @@
                 </a:solidFill>
                 <a:latin typeface="Roboto"/>
               </a:rPr>
-              <a:t>Youth outreach reached the smallest share: 88.4% (15 couldn't be helped). The main reason: program at capacity (19 people).</a:t>
+              <a:t>Youth outreach reached the smallest share: 87.0% (17 couldn't be helped). The main reason: program at capacity (17 people).</a:t>
             </a:r>
           </a:p>
         </p:txBody>
@@ -5736,7 +5736,7 @@
                 </a:solidFill>
                 <a:latin typeface="Roboto"/>
               </a:rPr>
-              <a:t>Data retrieved 2pm, Tue 6 Oct 2026 · Generated 8 Oct 2026, 6:29pm · Sample data · Made with Python (python-pptx)</a:t>
+              <a:t>Data retrieved 2pm, Tue 6 Oct 2026 · Generated 8 Oct 2026, 11:41pm · Sample data · Made with Python (python-pptx)</a:t>
             </a:r>
           </a:p>
         </p:txBody>
@@ -6051,7 +6051,7 @@
                 </a:solidFill>
                 <a:latin typeface="Roboto"/>
               </a:rPr>
-              <a:t>Data retrieved 2pm, Tue 6 Oct 2026 · Generated 8 Oct 2026, 6:29pm · Sample data · Made with Python (python-pptx)</a:t>
+              <a:t>Data retrieved 2pm, Tue 6 Oct 2026 · Generated 8 Oct 2026, 11:41pm · Sample data · Made with Python (python-pptx)</a:t>
             </a:r>
           </a:p>
         </p:txBody>
@@ -6359,7 +6359,119 @@
                           </a:solidFill>
                           <a:latin typeface="Roboto"/>
                         </a:rPr>
-                        <a:t>19</a:t>
+                        <a:t>17</a:t>
+                      </a:r>
+                    </a:p>
+                  </a:txBody>
+                  <a:tcPr>
+                    <a:solidFill>
+                      <a:srgbClr val="FFFFFF"/>
+                    </a:solidFill>
+                  </a:tcPr>
+                </a:tc>
+              </a:tr>
+              <a:tr h="310896">
+                <a:tc>
+                  <a:txBody>
+                    <a:bodyPr/>
+                    <a:lstStyle/>
+                    <a:p>
+                      <a:pPr algn="l">
+                        <a:defRPr>
+                          <a:latin typeface="Roboto"/>
+                        </a:defRPr>
+                      </a:pPr>
+                      <a:r>
+                        <a:rPr sz="1050">
+                          <a:solidFill>
+                            <a:srgbClr val="25342A"/>
+                          </a:solidFill>
+                          <a:latin typeface="Roboto"/>
+                        </a:rPr>
+                        <a:t>Couldn't make contact</a:t>
+                      </a:r>
+                    </a:p>
+                  </a:txBody>
+                  <a:tcPr>
+                    <a:solidFill>
+                      <a:srgbClr val="F7FAF7"/>
+                    </a:solidFill>
+                  </a:tcPr>
+                </a:tc>
+                <a:tc>
+                  <a:txBody>
+                    <a:bodyPr/>
+                    <a:lstStyle/>
+                    <a:p>
+                      <a:pPr algn="r">
+                        <a:defRPr>
+                          <a:latin typeface="Roboto"/>
+                        </a:defRPr>
+                      </a:pPr>
+                      <a:r>
+                        <a:rPr sz="1050">
+                          <a:solidFill>
+                            <a:srgbClr val="25342A"/>
+                          </a:solidFill>
+                          <a:latin typeface="Roboto"/>
+                        </a:rPr>
+                        <a:t>12</a:t>
+                      </a:r>
+                    </a:p>
+                  </a:txBody>
+                  <a:tcPr>
+                    <a:solidFill>
+                      <a:srgbClr val="F7FAF7"/>
+                    </a:solidFill>
+                  </a:tcPr>
+                </a:tc>
+              </a:tr>
+              <a:tr h="310896">
+                <a:tc>
+                  <a:txBody>
+                    <a:bodyPr/>
+                    <a:lstStyle/>
+                    <a:p>
+                      <a:pPr algn="l">
+                        <a:defRPr>
+                          <a:latin typeface="Roboto"/>
+                        </a:defRPr>
+                      </a:pPr>
+                      <a:r>
+                        <a:rPr sz="1050">
+                          <a:solidFill>
+                            <a:srgbClr val="25342A"/>
+                          </a:solidFill>
+                          <a:latin typeface="Roboto"/>
+                        </a:rPr>
+                        <a:t>Outside the service area</a:t>
+                      </a:r>
+                    </a:p>
+                  </a:txBody>
+                  <a:tcPr>
+                    <a:solidFill>
+                      <a:srgbClr val="FFFFFF"/>
+                    </a:solidFill>
+                  </a:tcPr>
+                </a:tc>
+                <a:tc>
+                  <a:txBody>
+                    <a:bodyPr/>
+                    <a:lstStyle/>
+                    <a:p>
+                      <a:pPr algn="r">
+                        <a:defRPr>
+                          <a:latin typeface="Roboto"/>
+                        </a:defRPr>
+                      </a:pPr>
+                      <a:r>
+                        <a:rPr sz="1050">
+                          <a:solidFill>
+                            <a:srgbClr val="25342A"/>
+                          </a:solidFill>
+                          <a:latin typeface="Roboto"/>
+                        </a:rPr>
+                        <a:t>12</a:t>
                       </a:r>
                     </a:p>
                   </a:txBody>
@@ -6415,119 +6527,7 @@
                           </a:solidFill>
                           <a:latin typeface="Roboto"/>
                         </a:rPr>
-                        <a:t>13</a:t>
-                      </a:r>
-                    </a:p>
-                  </a:txBody>
-                  <a:tcPr>
-                    <a:solidFill>
-                      <a:srgbClr val="F7FAF7"/>
-                    </a:solidFill>
-                  </a:tcPr>
-                </a:tc>
-              </a:tr>
-              <a:tr h="310896">
-                <a:tc>
-                  <a:txBody>
-                    <a:bodyPr/>
-                    <a:lstStyle/>
-                    <a:p>
-                      <a:pPr algn="l">
-                        <a:defRPr>
-                          <a:latin typeface="Roboto"/>
-                        </a:defRPr>
-                      </a:pPr>
-                      <a:r>
-                        <a:rPr sz="1050">
-                          <a:solidFill>
-                            <a:srgbClr val="25342A"/>
-                          </a:solidFill>
-                          <a:latin typeface="Roboto"/>
-                        </a:rPr>
-                        <a:t>Outside the service area</a:t>
-                      </a:r>
-                    </a:p>
-                  </a:txBody>
-                  <a:tcPr>
-                    <a:solidFill>
-                      <a:srgbClr val="FFFFFF"/>
-                    </a:solidFill>
-                  </a:tcPr>
-                </a:tc>
-                <a:tc>
-                  <a:txBody>
-                    <a:bodyPr/>
-                    <a:lstStyle/>
-                    <a:p>
-                      <a:pPr algn="r">
-                        <a:defRPr>
-                          <a:latin typeface="Roboto"/>
-                        </a:defRPr>
-                      </a:pPr>
-                      <a:r>
-                        <a:rPr sz="1050">
-                          <a:solidFill>
-                            <a:srgbClr val="25342A"/>
-                          </a:solidFill>
-                          <a:latin typeface="Roboto"/>
-                        </a:rPr>
-                        <a:t>11</a:t>
-                      </a:r>
-                    </a:p>
-                  </a:txBody>
-                  <a:tcPr>
-                    <a:solidFill>
-                      <a:srgbClr val="FFFFFF"/>
-                    </a:solidFill>
-                  </a:tcPr>
-                </a:tc>
-              </a:tr>
-              <a:tr h="310896">
-                <a:tc>
-                  <a:txBody>
-                    <a:bodyPr/>
-                    <a:lstStyle/>
-                    <a:p>
-                      <a:pPr algn="l">
-                        <a:defRPr>
-                          <a:latin typeface="Roboto"/>
-                        </a:defRPr>
-                      </a:pPr>
-                      <a:r>
-                        <a:rPr sz="1050">
-                          <a:solidFill>
-                            <a:srgbClr val="25342A"/>
-                          </a:solidFill>
-                          <a:latin typeface="Roboto"/>
-                        </a:rPr>
-                        <a:t>Couldn't make contact</a:t>
-                      </a:r>
-                    </a:p>
-                  </a:txBody>
-                  <a:tcPr>
-                    <a:solidFill>
-                      <a:srgbClr val="F7FAF7"/>
-                    </a:solidFill>
-                  </a:tcPr>
-                </a:tc>
-                <a:tc>
-                  <a:txBody>
-                    <a:bodyPr/>
-                    <a:lstStyle/>
-                    <a:p>
-                      <a:pPr algn="r">
-                        <a:defRPr>
-                          <a:latin typeface="Roboto"/>
-                        </a:defRPr>
-                      </a:pPr>
-                      <a:r>
-                        <a:rPr sz="1050">
-                          <a:solidFill>
-                            <a:srgbClr val="25342A"/>
-                          </a:solidFill>
-                          <a:latin typeface="Roboto"/>
-                        </a:rPr>
-                        <a:t>6</a:t>
+                        <a:t>7</a:t>
                       </a:r>
                     </a:p>
                   </a:txBody>
@@ -6583,7 +6583,7 @@
                           </a:solidFill>
                           <a:latin typeface="Roboto"/>
                         </a:rPr>
-                        <a:t>2</a:t>
+                        <a:t>4</a:t>
                       </a:r>
                     </a:p>
                   </a:txBody>
@@ -6671,7 +6671,7 @@
                 </a:solidFill>
                 <a:latin typeface="Roboto"/>
               </a:rPr>
-              <a:t>Data retrieved 2pm, Tue 6 Oct 2026 · Generated 8 Oct 2026, 6:29pm · Sample data · Made with Python (python-pptx)</a:t>
+              <a:t>Data retrieved 2pm, Tue 6 Oct 2026 · Generated 8 Oct 2026, 11:41pm · Sample data · Made with Python (python-pptx)</a:t>
             </a:r>
           </a:p>
         </p:txBody>

--- a/media/exports/reports/2025-11/people-helped.pptx
+++ b/media/exports/reports/2025-11/people-helped.pptx
@@ -969,7 +969,7 @@
           <a:lstStyle/>
           <a:p>
             <a:r>
-              <a:t>How many people did we help this month, and how many couldn't we reach?. Sample Community Services Ltd. Period: November 2025. People helped by each program, day by day, and the people who came to a program but couldn't be helped (and why). People helped are counted against each program's own grant spend.</a:t>
+              <a:t>How many people did we help this month, and how many couldn't we reach?. Sample Community Services Ltd. Period: November 2025. In short: 495 people helped in November; 52 couldn't be reached (90.5% reached, target 90.0%). People helped by each program, day by day, and the people who came to a program but couldn't be helped (and why). People helped are counted against each program's own grant spend.</a:t>
             </a:r>
           </a:p>
         </p:txBody>
@@ -4404,7 +4404,7 @@
         <p:spPr>
           <a:xfrm>
             <a:off x="457200" y="3703320"/>
-            <a:ext cx="11277295" cy="535940"/>
+            <a:ext cx="11277295" cy="758190"/>
           </a:xfrm>
           <a:prstGeom prst="rect">
             <a:avLst/>
@@ -4429,7 +4429,7 @@
                 </a:solidFill>
                 <a:latin typeface="Roboto"/>
               </a:rPr>
-              <a:t>Period: November 2025. People helped by each program, day by day, and the people who came to a program but couldn't be helped (and why). People helped are counted against each program's own grant spend.</a:t>
+              <a:t>Period: November 2025. In short: 495 people helped in November; 52 couldn't be reached (90.5% reached, target 90.0%). People helped by each program, day by day, and the people who came to a program but couldn't be helped (and why). People helped are counted against each program's own grant spend.</a:t>
             </a:r>
           </a:p>
         </p:txBody>
@@ -4442,7 +4442,7 @@
         </p:nvSpPr>
         <p:spPr>
           <a:xfrm>
-            <a:off x="457200" y="4330700"/>
+            <a:off x="457200" y="4552950"/>
             <a:ext cx="11277295" cy="1097280"/>
           </a:xfrm>
           <a:prstGeom prst="rect">
@@ -4594,7 +4594,7 @@
                 </a:solidFill>
                 <a:latin typeface="Roboto"/>
               </a:rPr>
-              <a:t>Data retrieved 2pm, Tue 6 Oct 2026 · Generated 8 Oct 2026, 11:41pm · Sample data · Made with Python (python-pptx)</a:t>
+              <a:t>Data retrieved 2pm, Tue 6 Oct 2026 · Generated 10 Oct 2026, 9:55pm · Sample data · Made with Python (python-pptx)</a:t>
             </a:r>
           </a:p>
         </p:txBody>
@@ -5736,7 +5736,7 @@
                 </a:solidFill>
                 <a:latin typeface="Roboto"/>
               </a:rPr>
-              <a:t>Data retrieved 2pm, Tue 6 Oct 2026 · Generated 8 Oct 2026, 11:41pm · Sample data · Made with Python (python-pptx)</a:t>
+              <a:t>Data retrieved 2pm, Tue 6 Oct 2026 · Generated 10 Oct 2026, 9:55pm · Sample data · Made with Python (python-pptx)</a:t>
             </a:r>
           </a:p>
         </p:txBody>
@@ -6051,7 +6051,7 @@
                 </a:solidFill>
                 <a:latin typeface="Roboto"/>
               </a:rPr>
-              <a:t>Data retrieved 2pm, Tue 6 Oct 2026 · Generated 8 Oct 2026, 11:41pm · Sample data · Made with Python (python-pptx)</a:t>
+              <a:t>Data retrieved 2pm, Tue 6 Oct 2026 · Generated 10 Oct 2026, 9:55pm · Sample data · Made with Python (python-pptx)</a:t>
             </a:r>
           </a:p>
         </p:txBody>
@@ -6671,7 +6671,7 @@
                 </a:solidFill>
                 <a:latin typeface="Roboto"/>
               </a:rPr>
-              <a:t>Data retrieved 2pm, Tue 6 Oct 2026 · Generated 8 Oct 2026, 11:41pm · Sample data · Made with Python (python-pptx)</a:t>
+              <a:t>Data retrieved 2pm, Tue 6 Oct 2026 · Generated 10 Oct 2026, 9:55pm · Sample data · Made with Python (python-pptx)</a:t>
             </a:r>
           </a:p>
         </p:txBody>
